--- a/outputs/artifact-atlas-v2/theme-variants/nodeslide-theme-intelligence-v2.pptx
+++ b/outputs/artifact-atlas-v2/theme-variants/nodeslide-theme-intelligence-v2.pptx
@@ -2783,7 +2783,7 @@
                 <a:ea typeface="Aptos" pitchFamily="34" charset="-122"/>
                 <a:cs typeface="Aptos" pitchFamily="34" charset="-120"/>
               </a:rPr>
-              <a:t>38 reusable</a:t>
+              <a:t>V1 gallery</a:t>
             </a:r>
             <a:endParaRPr lang="en-US" sz="1152" dirty="0"/>
           </a:p>
@@ -2800,7 +2800,7 @@
                 <a:ea typeface="Aptos" pitchFamily="34" charset="-122"/>
                 <a:cs typeface="Aptos" pitchFamily="34" charset="-120"/>
               </a:rPr>
-              <a:t>patterns</a:t>
+              <a:t>12 patterns</a:t>
             </a:r>
             <a:endParaRPr lang="en-US" sz="1152" dirty="0"/>
           </a:p>
@@ -3540,7 +3540,7 @@
                 <a:ea typeface="Aptos" pitchFamily="34" charset="-122"/>
                 <a:cs typeface="Aptos" pitchFamily="34" charset="-120"/>
               </a:rPr>
-              <a:t>38 reusable</a:t>
+              <a:t>V1 gallery</a:t>
             </a:r>
             <a:endParaRPr lang="en-US" sz="1152" dirty="0"/>
           </a:p>
@@ -3557,7 +3557,7 @@
                 <a:ea typeface="Aptos" pitchFamily="34" charset="-122"/>
                 <a:cs typeface="Aptos" pitchFamily="34" charset="-120"/>
               </a:rPr>
-              <a:t>patterns</a:t>
+              <a:t>12 patterns</a:t>
             </a:r>
             <a:endParaRPr lang="en-US" sz="1152" dirty="0"/>
           </a:p>
@@ -4297,7 +4297,7 @@
                 <a:ea typeface="Aptos" pitchFamily="34" charset="-122"/>
                 <a:cs typeface="Aptos" pitchFamily="34" charset="-120"/>
               </a:rPr>
-              <a:t>38 reusable</a:t>
+              <a:t>V1 gallery</a:t>
             </a:r>
             <a:endParaRPr lang="en-US" sz="1152" dirty="0"/>
           </a:p>
@@ -4314,7 +4314,7 @@
                 <a:ea typeface="Aptos" pitchFamily="34" charset="-122"/>
                 <a:cs typeface="Aptos" pitchFamily="34" charset="-120"/>
               </a:rPr>
-              <a:t>patterns</a:t>
+              <a:t>12 patterns</a:t>
             </a:r>
             <a:endParaRPr lang="en-US" sz="1152" dirty="0"/>
           </a:p>
@@ -5986,7 +5986,7 @@
                 <a:ea typeface="Aptos Mono" pitchFamily="34" charset="-122"/>
                 <a:cs typeface="Aptos Mono" pitchFamily="34" charset="-120"/>
               </a:rPr>
-              <a:t>BRIEF → WINNER FUNNEL</a:t>
+              <a:t>FROZEN ARENA · CANDIDATE FUNNEL</a:t>
             </a:r>
             <a:endParaRPr lang="en-US" sz="1024" dirty="0"/>
           </a:p>
@@ -6326,7 +6326,7 @@
                 <a:ea typeface="Aptos" pitchFamily="34" charset="-122"/>
                 <a:cs typeface="Aptos" pitchFamily="34" charset="-120"/>
               </a:rPr>
-              <a:t>Human winner · 1</a:t>
+              <a:t>Prior human winner · 1</a:t>
             </a:r>
             <a:endParaRPr lang="en-US" sz="1088" dirty="0"/>
           </a:p>
@@ -6425,7 +6425,7 @@
               <a:buNone/>
             </a:pPr>
             <a:r>
-              <a:rPr lang="en-US" sz="1920" b="1" dirty="0">
+              <a:rPr lang="en-US" sz="1728" b="1" dirty="0">
                 <a:solidFill>
                   <a:srgbClr val="A63B32"/>
                 </a:solidFill>
@@ -6433,9 +6433,9 @@
                 <a:ea typeface="Aptos" pitchFamily="34" charset="-122"/>
                 <a:cs typeface="Aptos" pitchFamily="34" charset="-120"/>
               </a:rPr>
-              <a:t>2 artifacts need repair</a:t>
-            </a:r>
-            <a:endParaRPr lang="en-US" sz="1920" dirty="0"/>
+              <a:t>2 Arena candidates failed gates</a:t>
+            </a:r>
+            <a:endParaRPr lang="en-US" sz="1728" dirty="0"/>
           </a:p>
         </p:txBody>
       </p:sp>
@@ -6466,7 +6466,7 @@
               <a:buNone/>
             </a:pPr>
             <a:r>
-              <a:rPr lang="en-US" sz="1216" dirty="0">
+              <a:rPr lang="en-US" sz="1152" dirty="0">
                 <a:solidFill>
                   <a:srgbClr val="17231E"/>
                 </a:solidFill>
@@ -6474,9 +6474,9 @@
                 <a:ea typeface="Aptos" pitchFamily="34" charset="-122"/>
                 <a:cs typeface="Aptos" pitchFamily="34" charset="-120"/>
               </a:rPr>
-              <a:t>Both remain visibly red</a:t>
-            </a:r>
-            <a:endParaRPr lang="en-US" sz="1216" dirty="0"/>
+              <a:t>Historical result; not current Atlas status</a:t>
+            </a:r>
+            <a:endParaRPr lang="en-US" sz="1152" dirty="0"/>
           </a:p>
         </p:txBody>
       </p:sp>
@@ -7068,7 +7068,7 @@
                 <a:ea typeface="Aptos Mono" pitchFamily="34" charset="-122"/>
                 <a:cs typeface="Aptos Mono" pitchFamily="34" charset="-120"/>
               </a:rPr>
-              <a:t>BRIEF → WINNER FUNNEL</a:t>
+              <a:t>FROZEN ARENA · CANDIDATE FUNNEL</a:t>
             </a:r>
             <a:endParaRPr lang="en-US" sz="1024" dirty="0"/>
           </a:p>
@@ -7408,7 +7408,7 @@
                 <a:ea typeface="Aptos" pitchFamily="34" charset="-122"/>
                 <a:cs typeface="Aptos" pitchFamily="34" charset="-120"/>
               </a:rPr>
-              <a:t>Human winner · 1</a:t>
+              <a:t>Prior human winner · 1</a:t>
             </a:r>
             <a:endParaRPr lang="en-US" sz="1088" dirty="0"/>
           </a:p>
@@ -7507,7 +7507,7 @@
               <a:buNone/>
             </a:pPr>
             <a:r>
-              <a:rPr lang="en-US" sz="1920" b="1" dirty="0">
+              <a:rPr lang="en-US" sz="1728" b="1" dirty="0">
                 <a:solidFill>
                   <a:srgbClr val="FF7A70"/>
                 </a:solidFill>
@@ -7515,9 +7515,9 @@
                 <a:ea typeface="Aptos" pitchFamily="34" charset="-122"/>
                 <a:cs typeface="Aptos" pitchFamily="34" charset="-120"/>
               </a:rPr>
-              <a:t>2 artifacts need repair</a:t>
-            </a:r>
-            <a:endParaRPr lang="en-US" sz="1920" dirty="0"/>
+              <a:t>2 Arena candidates failed gates</a:t>
+            </a:r>
+            <a:endParaRPr lang="en-US" sz="1728" dirty="0"/>
           </a:p>
         </p:txBody>
       </p:sp>
@@ -7548,7 +7548,7 @@
               <a:buNone/>
             </a:pPr>
             <a:r>
-              <a:rPr lang="en-US" sz="1216" dirty="0">
+              <a:rPr lang="en-US" sz="1152" dirty="0">
                 <a:solidFill>
                   <a:srgbClr val="F4F1E8"/>
                 </a:solidFill>
@@ -7556,9 +7556,9 @@
                 <a:ea typeface="Aptos" pitchFamily="34" charset="-122"/>
                 <a:cs typeface="Aptos" pitchFamily="34" charset="-120"/>
               </a:rPr>
-              <a:t>Both remain visibly red</a:t>
-            </a:r>
-            <a:endParaRPr lang="en-US" sz="1216" dirty="0"/>
+              <a:t>Historical result; not current Atlas status</a:t>
+            </a:r>
+            <a:endParaRPr lang="en-US" sz="1152" dirty="0"/>
           </a:p>
         </p:txBody>
       </p:sp>
@@ -8150,7 +8150,7 @@
                 <a:ea typeface="Aptos Mono" pitchFamily="34" charset="-122"/>
                 <a:cs typeface="Aptos Mono" pitchFamily="34" charset="-120"/>
               </a:rPr>
-              <a:t>BRIEF → WINNER FUNNEL</a:t>
+              <a:t>FROZEN ARENA · CANDIDATE FUNNEL</a:t>
             </a:r>
             <a:endParaRPr lang="en-US" sz="1024" dirty="0"/>
           </a:p>
@@ -8490,7 +8490,7 @@
                 <a:ea typeface="Aptos" pitchFamily="34" charset="-122"/>
                 <a:cs typeface="Aptos" pitchFamily="34" charset="-120"/>
               </a:rPr>
-              <a:t>Human winner · 1</a:t>
+              <a:t>Prior human winner · 1</a:t>
             </a:r>
             <a:endParaRPr lang="en-US" sz="1088" dirty="0"/>
           </a:p>
@@ -8589,7 +8589,7 @@
               <a:buNone/>
             </a:pPr>
             <a:r>
-              <a:rPr lang="en-US" sz="1920" b="1" dirty="0">
+              <a:rPr lang="en-US" sz="1728" b="1" dirty="0">
                 <a:solidFill>
                   <a:srgbClr val="A64135"/>
                 </a:solidFill>
@@ -8597,9 +8597,9 @@
                 <a:ea typeface="Aptos" pitchFamily="34" charset="-122"/>
                 <a:cs typeface="Aptos" pitchFamily="34" charset="-120"/>
               </a:rPr>
-              <a:t>2 artifacts need repair</a:t>
-            </a:r>
-            <a:endParaRPr lang="en-US" sz="1920" dirty="0"/>
+              <a:t>2 Arena candidates failed gates</a:t>
+            </a:r>
+            <a:endParaRPr lang="en-US" sz="1728" dirty="0"/>
           </a:p>
         </p:txBody>
       </p:sp>
@@ -8630,7 +8630,7 @@
               <a:buNone/>
             </a:pPr>
             <a:r>
-              <a:rPr lang="en-US" sz="1216" dirty="0">
+              <a:rPr lang="en-US" sz="1152" dirty="0">
                 <a:solidFill>
                   <a:srgbClr val="102A2A"/>
                 </a:solidFill>
@@ -8638,9 +8638,9 @@
                 <a:ea typeface="Aptos" pitchFamily="34" charset="-122"/>
                 <a:cs typeface="Aptos" pitchFamily="34" charset="-120"/>
               </a:rPr>
-              <a:t>Both remain visibly red</a:t>
-            </a:r>
-            <a:endParaRPr lang="en-US" sz="1216" dirty="0"/>
+              <a:t>Historical result; not current Atlas status</a:t>
+            </a:r>
+            <a:endParaRPr lang="en-US" sz="1152" dirty="0"/>
           </a:p>
         </p:txBody>
       </p:sp>
